--- a/workflow_description/Agrecolvre_scheme.pptx
+++ b/workflow_description/Agrecolvre_scheme.pptx
@@ -66,7 +66,7 @@
         <p:txBody>
           <a:bodyPr/>
           <a:p>
-            <a:fld id="{D80799A5-3E94-4A02-ABD9-90002848A6D2}" type="slidenum">
+            <a:fld id="{F9AC7B7E-53DD-447D-B0ED-3882849CEA3D}" type="slidenum">
               <a:t>&lt;#&gt;</a:t>
             </a:fld>
           </a:p>
@@ -275,7 +275,7 @@
         <p:txBody>
           <a:bodyPr/>
           <a:p>
-            <a:fld id="{07604B35-BD49-4197-B7EA-812F6BEBF348}" type="slidenum">
+            <a:fld id="{A1630FCB-402F-4E2C-B8EE-E4173A69FCAF}" type="slidenum">
               <a:t>&lt;#&gt;</a:t>
             </a:fld>
           </a:p>
@@ -570,7 +570,7 @@
         <p:txBody>
           <a:bodyPr/>
           <a:p>
-            <a:fld id="{16616F9B-6D5B-4F3E-BB12-219089F9DF34}" type="slidenum">
+            <a:fld id="{65A0BA0D-1BC5-4BFB-BBE4-20CDE01BCADE}" type="slidenum">
               <a:t>&lt;#&gt;</a:t>
             </a:fld>
           </a:p>
@@ -951,7 +951,7 @@
         <p:txBody>
           <a:bodyPr/>
           <a:p>
-            <a:fld id="{4B4B5A1E-A083-4B53-9DD5-CDAC689490C3}" type="slidenum">
+            <a:fld id="{D7776CB8-854E-45D8-9BBB-E1504E326AF9}" type="slidenum">
               <a:t>&lt;#&gt;</a:t>
             </a:fld>
           </a:p>
@@ -1034,7 +1034,7 @@
         <p:txBody>
           <a:bodyPr/>
           <a:p>
-            <a:fld id="{80079085-ED33-4F54-A5C6-05B16DB3A6B8}" type="slidenum">
+            <a:fld id="{5915F186-C8AD-4737-BA21-472EA8A8505D}" type="slidenum">
               <a:t>&lt;#&gt;</a:t>
             </a:fld>
           </a:p>
@@ -1197,7 +1197,7 @@
         <p:txBody>
           <a:bodyPr/>
           <a:p>
-            <a:fld id="{FF56FF94-A1EB-452B-BFBB-B55BF9C9B304}" type="slidenum">
+            <a:fld id="{1AFC04C4-86A8-4EAD-B8C6-EB9071C26286}" type="slidenum">
               <a:t>&lt;#&gt;</a:t>
             </a:fld>
           </a:p>
@@ -1363,7 +1363,7 @@
         <p:txBody>
           <a:bodyPr/>
           <a:p>
-            <a:fld id="{9F593C28-BF1C-4F2C-88B9-A54A7E6D8809}" type="slidenum">
+            <a:fld id="{CCA28769-A0B5-455E-B78F-418974B69B02}" type="slidenum">
               <a:t>&lt;#&gt;</a:t>
             </a:fld>
           </a:p>
@@ -1572,7 +1572,7 @@
         <p:txBody>
           <a:bodyPr/>
           <a:p>
-            <a:fld id="{142348CD-5B85-41F6-BDAF-9B4B908D884D}" type="slidenum">
+            <a:fld id="{CD8B41B8-51D3-4617-AEB0-F3F1953CE6A5}" type="slidenum">
               <a:t>&lt;#&gt;</a:t>
             </a:fld>
           </a:p>
@@ -1695,7 +1695,7 @@
         <p:txBody>
           <a:bodyPr/>
           <a:p>
-            <a:fld id="{87460AA6-AAE9-4C34-A259-71A8EC398FB7}" type="slidenum">
+            <a:fld id="{27D58F1E-A700-4CD1-B09A-71F9769A6B1B}" type="slidenum">
               <a:t>&lt;#&gt;</a:t>
             </a:fld>
           </a:p>
@@ -1816,7 +1816,7 @@
         <p:txBody>
           <a:bodyPr/>
           <a:p>
-            <a:fld id="{592B2F98-23CC-4DBB-9274-3755B6690C75}" type="slidenum">
+            <a:fld id="{441F523C-3398-4585-8B03-3199F40ED3D1}" type="slidenum">
               <a:t>&lt;#&gt;</a:t>
             </a:fld>
           </a:p>
@@ -2068,7 +2068,7 @@
         <p:txBody>
           <a:bodyPr/>
           <a:p>
-            <a:fld id="{F87CCC72-D0BE-4962-933F-A1DD0FF1E93D}" type="slidenum">
+            <a:fld id="{0FE5BE24-4149-4F4B-9FD7-15BC40CD464F}" type="slidenum">
               <a:t>&lt;#&gt;</a:t>
             </a:fld>
           </a:p>
@@ -2231,7 +2231,7 @@
         <p:txBody>
           <a:bodyPr/>
           <a:p>
-            <a:fld id="{504F6319-B945-4992-BF52-750BEF502F98}" type="slidenum">
+            <a:fld id="{3270DDDC-EEE8-4764-AFBA-5EA26496CCCF}" type="slidenum">
               <a:t>&lt;#&gt;</a:t>
             </a:fld>
           </a:p>
@@ -2483,7 +2483,7 @@
         <p:txBody>
           <a:bodyPr/>
           <a:p>
-            <a:fld id="{871486BF-E3E3-474E-957F-C2DCD9145557}" type="slidenum">
+            <a:fld id="{499F33EF-F728-4A76-A1B3-2481FDA828CD}" type="slidenum">
               <a:t>&lt;#&gt;</a:t>
             </a:fld>
           </a:p>
@@ -2735,7 +2735,7 @@
         <p:txBody>
           <a:bodyPr/>
           <a:p>
-            <a:fld id="{44217E3F-2B7E-4C45-B2D7-4E9EB689A57A}" type="slidenum">
+            <a:fld id="{BCDDC8EF-DBAA-493E-85D7-86C0C7429D82}" type="slidenum">
               <a:t>&lt;#&gt;</a:t>
             </a:fld>
           </a:p>
@@ -2944,7 +2944,7 @@
         <p:txBody>
           <a:bodyPr/>
           <a:p>
-            <a:fld id="{42F29A30-1F2C-41F9-A6EC-F61C119EDA84}" type="slidenum">
+            <a:fld id="{FF8F0C96-41F3-4E03-9F5A-34E0F90A8252}" type="slidenum">
               <a:t>&lt;#&gt;</a:t>
             </a:fld>
           </a:p>
@@ -3239,7 +3239,7 @@
         <p:txBody>
           <a:bodyPr/>
           <a:p>
-            <a:fld id="{CD14E3A7-1B29-43BD-995E-EA0B70DBDBCC}" type="slidenum">
+            <a:fld id="{4D105A6F-E886-4E7E-95B3-1CE6B1494775}" type="slidenum">
               <a:t>&lt;#&gt;</a:t>
             </a:fld>
           </a:p>
@@ -3620,7 +3620,7 @@
         <p:txBody>
           <a:bodyPr/>
           <a:p>
-            <a:fld id="{BC5E7729-A8CC-4C2B-ACCF-3A0213D53A8A}" type="slidenum">
+            <a:fld id="{35D66588-3DDB-492C-97AD-737287341EA5}" type="slidenum">
               <a:t>&lt;#&gt;</a:t>
             </a:fld>
           </a:p>
@@ -3786,7 +3786,7 @@
         <p:txBody>
           <a:bodyPr/>
           <a:p>
-            <a:fld id="{F3AD254C-84AF-4D3D-B862-4660F359C0EE}" type="slidenum">
+            <a:fld id="{ACB84F8E-CDF6-4215-ACF8-53FBC90809FF}" type="slidenum">
               <a:t>&lt;#&gt;</a:t>
             </a:fld>
           </a:p>
@@ -3995,7 +3995,7 @@
         <p:txBody>
           <a:bodyPr/>
           <a:p>
-            <a:fld id="{ABE09DB9-2B4A-4B7A-984F-20912BF6CD21}" type="slidenum">
+            <a:fld id="{5C45676D-6421-4A7C-A781-E1D0FEED6EC5}" type="slidenum">
               <a:t>&lt;#&gt;</a:t>
             </a:fld>
           </a:p>
@@ -4118,7 +4118,7 @@
         <p:txBody>
           <a:bodyPr/>
           <a:p>
-            <a:fld id="{5A74D556-4BC1-43BB-89DB-FA35417F7BBF}" type="slidenum">
+            <a:fld id="{911B16E7-5E48-447D-974C-EB82240E59A4}" type="slidenum">
               <a:t>&lt;#&gt;</a:t>
             </a:fld>
           </a:p>
@@ -4239,7 +4239,7 @@
         <p:txBody>
           <a:bodyPr/>
           <a:p>
-            <a:fld id="{0AD4E808-9DCC-4C1C-B7D7-D3B7D0082411}" type="slidenum">
+            <a:fld id="{818D5BDC-0109-42FD-B467-9E4F1DDD300F}" type="slidenum">
               <a:t>&lt;#&gt;</a:t>
             </a:fld>
           </a:p>
@@ -4491,7 +4491,7 @@
         <p:txBody>
           <a:bodyPr/>
           <a:p>
-            <a:fld id="{B3F2BF0E-D3B5-460A-B2EA-3A1BF4D55457}" type="slidenum">
+            <a:fld id="{61060BDB-ACBD-46F7-A997-7A52A100A306}" type="slidenum">
               <a:t>&lt;#&gt;</a:t>
             </a:fld>
           </a:p>
@@ -4743,7 +4743,7 @@
         <p:txBody>
           <a:bodyPr/>
           <a:p>
-            <a:fld id="{B7912898-9948-4A78-BC1F-4C7BCE5517A7}" type="slidenum">
+            <a:fld id="{2AEF1120-E836-40EA-BF94-5430F0B587B3}" type="slidenum">
               <a:t>&lt;#&gt;</a:t>
             </a:fld>
           </a:p>
@@ -4995,7 +4995,7 @@
         <p:txBody>
           <a:bodyPr/>
           <a:p>
-            <a:fld id="{086A630F-D820-4316-AAC1-330F1F2936A7}" type="slidenum">
+            <a:fld id="{DA111A1F-50EB-4402-8773-B2427373E89C}" type="slidenum">
               <a:t>&lt;#&gt;</a:t>
             </a:fld>
           </a:p>
@@ -5057,7 +5057,7 @@
         <p:spPr>
           <a:xfrm>
             <a:off x="3447360" y="5165280"/>
-            <a:ext cx="3193920" cy="389520"/>
+            <a:ext cx="3193560" cy="389160"/>
           </a:xfrm>
           <a:prstGeom prst="rect">
             <a:avLst/>
@@ -5129,7 +5129,7 @@
         <p:spPr>
           <a:xfrm>
             <a:off x="7227360" y="5165280"/>
-            <a:ext cx="2347200" cy="389520"/>
+            <a:ext cx="2346840" cy="389160"/>
           </a:xfrm>
           <a:prstGeom prst="rect">
             <a:avLst/>
@@ -5170,7 +5170,7 @@
                 <a:tab algn="l" pos="0"/>
               </a:tabLst>
             </a:pPr>
-            <a:fld id="{6577C64A-BE0F-44BB-BB25-0E2A2B578D7B}" type="slidenum">
+            <a:fld id="{99A70E89-E30D-4A52-8AF2-F953B8699D71}" type="slidenum">
               <a:rPr b="0" lang="en-GB" sz="1400" spc="-1" strike="noStrike">
                 <a:solidFill>
                   <a:srgbClr val="000000"/>
@@ -5201,7 +5201,7 @@
         <p:spPr>
           <a:xfrm>
             <a:off x="504000" y="5165280"/>
-            <a:ext cx="2347200" cy="389520"/>
+            <a:ext cx="2346840" cy="389160"/>
           </a:xfrm>
           <a:prstGeom prst="rect">
             <a:avLst/>
@@ -5572,7 +5572,7 @@
         <p:spPr>
           <a:xfrm>
             <a:off x="3447360" y="5165280"/>
-            <a:ext cx="3193920" cy="389520"/>
+            <a:ext cx="3193560" cy="389160"/>
           </a:xfrm>
           <a:prstGeom prst="rect">
             <a:avLst/>
@@ -5644,7 +5644,7 @@
         <p:spPr>
           <a:xfrm>
             <a:off x="7227360" y="5165280"/>
-            <a:ext cx="2347200" cy="389520"/>
+            <a:ext cx="2346840" cy="389160"/>
           </a:xfrm>
           <a:prstGeom prst="rect">
             <a:avLst/>
@@ -5685,7 +5685,7 @@
                 <a:tab algn="l" pos="0"/>
               </a:tabLst>
             </a:pPr>
-            <a:fld id="{1F915FAE-7726-42B1-8756-03717C4FD0E1}" type="slidenum">
+            <a:fld id="{4330086B-4266-46FF-9A74-0E725D97A52E}" type="slidenum">
               <a:rPr b="0" lang="en-GB" sz="1400" spc="-1" strike="noStrike">
                 <a:solidFill>
                   <a:srgbClr val="000000"/>
@@ -5716,7 +5716,7 @@
         <p:spPr>
           <a:xfrm>
             <a:off x="504000" y="5165280"/>
-            <a:ext cx="2347200" cy="389520"/>
+            <a:ext cx="2346840" cy="389160"/>
           </a:xfrm>
           <a:prstGeom prst="rect">
             <a:avLst/>
@@ -6087,7 +6087,7 @@
         <p:spPr>
           <a:xfrm>
             <a:off x="594360" y="308520"/>
-            <a:ext cx="8913960" cy="5056200"/>
+            <a:ext cx="8913600" cy="5055840"/>
           </a:xfrm>
           <a:prstGeom prst="rect">
             <a:avLst/>
@@ -6140,7 +6140,7 @@
         <p:spPr>
           <a:xfrm>
             <a:off x="612000" y="2126160"/>
-            <a:ext cx="499320" cy="466200"/>
+            <a:ext cx="498960" cy="465840"/>
           </a:xfrm>
           <a:prstGeom prst="rect">
             <a:avLst/>
@@ -6163,7 +6163,7 @@
         <p:spPr>
           <a:xfrm>
             <a:off x="612360" y="3278520"/>
-            <a:ext cx="499320" cy="466200"/>
+            <a:ext cx="498960" cy="465840"/>
           </a:xfrm>
           <a:prstGeom prst="rect">
             <a:avLst/>
@@ -6182,7 +6182,7 @@
         <p:spPr>
           <a:xfrm>
             <a:off x="612000" y="1728000"/>
-            <a:ext cx="681480" cy="382680"/>
+            <a:ext cx="681120" cy="382320"/>
           </a:xfrm>
           <a:prstGeom prst="rect">
             <a:avLst/>
@@ -6236,7 +6236,7 @@
         <p:spPr>
           <a:xfrm>
             <a:off x="612360" y="2900520"/>
-            <a:ext cx="681480" cy="382680"/>
+            <a:ext cx="681120" cy="382320"/>
           </a:xfrm>
           <a:prstGeom prst="rect">
             <a:avLst/>
@@ -6294,7 +6294,7 @@
         <p:spPr>
           <a:xfrm>
             <a:off x="1926000" y="2166840"/>
-            <a:ext cx="394920" cy="394920"/>
+            <a:ext cx="394560" cy="394560"/>
           </a:xfrm>
           <a:prstGeom prst="rect">
             <a:avLst/>
@@ -6317,7 +6317,7 @@
         <p:spPr>
           <a:xfrm>
             <a:off x="2255040" y="2287080"/>
-            <a:ext cx="232200" cy="321840"/>
+            <a:ext cx="231840" cy="321480"/>
           </a:xfrm>
           <a:prstGeom prst="rect">
             <a:avLst/>
@@ -6336,7 +6336,7 @@
         <p:spPr>
           <a:xfrm>
             <a:off x="1836360" y="1728360"/>
-            <a:ext cx="1043280" cy="382680"/>
+            <a:ext cx="1042920" cy="382320"/>
           </a:xfrm>
           <a:prstGeom prst="rect">
             <a:avLst/>
@@ -6390,7 +6390,7 @@
         <p:spPr>
           <a:xfrm>
             <a:off x="1270080" y="2376000"/>
-            <a:ext cx="505080" cy="1080"/>
+            <a:ext cx="505440" cy="1440"/>
           </a:xfrm>
           <a:prstGeom prst="straightConnector1">
             <a:avLst/>
@@ -6417,7 +6417,7 @@
         <p:spPr>
           <a:xfrm>
             <a:off x="1926360" y="3318840"/>
-            <a:ext cx="394920" cy="394920"/>
+            <a:ext cx="394560" cy="394560"/>
           </a:xfrm>
           <a:prstGeom prst="rect">
             <a:avLst/>
@@ -6436,7 +6436,7 @@
         <p:spPr>
           <a:xfrm>
             <a:off x="1836720" y="2916360"/>
-            <a:ext cx="1042920" cy="529200"/>
+            <a:ext cx="1042560" cy="528840"/>
           </a:xfrm>
           <a:prstGeom prst="rect">
             <a:avLst/>
@@ -6490,7 +6490,7 @@
         <p:spPr>
           <a:xfrm>
             <a:off x="1270080" y="3492000"/>
-            <a:ext cx="505080" cy="1080"/>
+            <a:ext cx="505440" cy="1440"/>
           </a:xfrm>
           <a:prstGeom prst="straightConnector1">
             <a:avLst/>
@@ -6517,7 +6517,7 @@
         <p:spPr>
           <a:xfrm>
             <a:off x="2221920" y="3413160"/>
-            <a:ext cx="263520" cy="345960"/>
+            <a:ext cx="263160" cy="345600"/>
           </a:xfrm>
           <a:prstGeom prst="rect">
             <a:avLst/>
@@ -6536,7 +6536,7 @@
         <p:spPr>
           <a:xfrm>
             <a:off x="3220200" y="2116080"/>
-            <a:ext cx="808560" cy="519480"/>
+            <a:ext cx="808200" cy="519120"/>
           </a:xfrm>
           <a:prstGeom prst="rect">
             <a:avLst/>
@@ -6596,7 +6596,7 @@
         <p:spPr>
           <a:xfrm>
             <a:off x="2602080" y="2376000"/>
-            <a:ext cx="582840" cy="720"/>
+            <a:ext cx="583200" cy="1080"/>
           </a:xfrm>
           <a:prstGeom prst="straightConnector1">
             <a:avLst/>
@@ -6619,7 +6619,7 @@
         <p:spPr>
           <a:xfrm>
             <a:off x="3222720" y="3232080"/>
-            <a:ext cx="808560" cy="519480"/>
+            <a:ext cx="808200" cy="519120"/>
           </a:xfrm>
           <a:prstGeom prst="rect">
             <a:avLst/>
@@ -6679,7 +6679,7 @@
         <p:spPr>
           <a:xfrm>
             <a:off x="2605320" y="3492000"/>
-            <a:ext cx="582120" cy="720"/>
+            <a:ext cx="582480" cy="1080"/>
           </a:xfrm>
           <a:prstGeom prst="straightConnector1">
             <a:avLst/>
@@ -6702,7 +6702,7 @@
         <p:spPr>
           <a:xfrm>
             <a:off x="4591440" y="2635920"/>
-            <a:ext cx="808560" cy="519480"/>
+            <a:ext cx="808200" cy="519120"/>
           </a:xfrm>
           <a:prstGeom prst="rect">
             <a:avLst/>
@@ -6764,8 +6764,8 @@
         </p:nvCxnSpPr>
         <p:spPr>
           <a:xfrm>
-            <a:off x="4028760" y="2375640"/>
-            <a:ext cx="563040" cy="520200"/>
+            <a:off x="4028400" y="2375640"/>
+            <a:ext cx="563400" cy="520200"/>
           </a:xfrm>
           <a:prstGeom prst="straightConnector1">
             <a:avLst/>
@@ -6790,8 +6790,8 @@
         </p:nvCxnSpPr>
         <p:spPr>
           <a:xfrm flipV="1">
-            <a:off x="4031280" y="2895480"/>
-            <a:ext cx="560520" cy="596520"/>
+            <a:off x="4030920" y="2895480"/>
+            <a:ext cx="560880" cy="596520"/>
           </a:xfrm>
           <a:prstGeom prst="straightConnector1">
             <a:avLst/>
@@ -6814,7 +6814,7 @@
         <p:spPr>
           <a:xfrm>
             <a:off x="432000" y="1694520"/>
-            <a:ext cx="3779280" cy="1004760"/>
+            <a:ext cx="3778920" cy="1004400"/>
           </a:xfrm>
           <a:prstGeom prst="rect">
             <a:avLst/>
@@ -6862,7 +6862,7 @@
         <p:spPr>
           <a:xfrm>
             <a:off x="645480" y="1325160"/>
-            <a:ext cx="1117800" cy="344160"/>
+            <a:ext cx="1117440" cy="343800"/>
           </a:xfrm>
           <a:prstGeom prst="rect">
             <a:avLst/>
@@ -6916,7 +6916,7 @@
         <p:spPr>
           <a:xfrm>
             <a:off x="432000" y="2927520"/>
-            <a:ext cx="3779280" cy="1004760"/>
+            <a:ext cx="3778920" cy="1004400"/>
           </a:xfrm>
           <a:prstGeom prst="rect">
             <a:avLst/>
@@ -6964,7 +6964,7 @@
         <p:spPr>
           <a:xfrm>
             <a:off x="645480" y="3890160"/>
-            <a:ext cx="1117800" cy="344160"/>
+            <a:ext cx="1117440" cy="343800"/>
           </a:xfrm>
           <a:prstGeom prst="rect">
             <a:avLst/>
@@ -7020,8 +7020,8 @@
         </p:nvCxnSpPr>
         <p:spPr>
           <a:xfrm flipV="1">
-            <a:off x="5400000" y="2891160"/>
-            <a:ext cx="520560" cy="4680"/>
+            <a:off x="5399640" y="2891160"/>
+            <a:ext cx="520920" cy="4680"/>
           </a:xfrm>
           <a:prstGeom prst="straightConnector1">
             <a:avLst/>
@@ -7044,7 +7044,7 @@
         <p:spPr>
           <a:xfrm>
             <a:off x="5920200" y="2631600"/>
-            <a:ext cx="808560" cy="519480"/>
+            <a:ext cx="808200" cy="519120"/>
           </a:xfrm>
           <a:prstGeom prst="rect">
             <a:avLst/>
@@ -7106,8 +7106,8 @@
         </p:nvCxnSpPr>
         <p:spPr>
           <a:xfrm>
-            <a:off x="4995720" y="3155400"/>
-            <a:ext cx="324720" cy="380880"/>
+            <a:off x="4995360" y="3155040"/>
+            <a:ext cx="324720" cy="381240"/>
           </a:xfrm>
           <a:prstGeom prst="straightConnector1">
             <a:avLst/>
@@ -7130,7 +7130,7 @@
         <p:spPr>
           <a:xfrm>
             <a:off x="4915800" y="3535920"/>
-            <a:ext cx="808560" cy="519480"/>
+            <a:ext cx="808200" cy="519120"/>
           </a:xfrm>
           <a:prstGeom prst="rect">
             <a:avLst/>
@@ -7190,7 +7190,7 @@
         <p:spPr>
           <a:xfrm>
             <a:off x="4387680" y="2520000"/>
-            <a:ext cx="2519280" cy="1680840"/>
+            <a:ext cx="2518920" cy="1680480"/>
           </a:xfrm>
           <a:prstGeom prst="rect">
             <a:avLst/>
@@ -7238,7 +7238,7 @@
         <p:spPr>
           <a:xfrm>
             <a:off x="4569480" y="2159640"/>
-            <a:ext cx="1117800" cy="344160"/>
+            <a:ext cx="1117440" cy="343800"/>
           </a:xfrm>
           <a:prstGeom prst="rect">
             <a:avLst/>
@@ -7293,8 +7293,8 @@
         </p:nvCxnSpPr>
         <p:spPr>
           <a:xfrm flipV="1">
-            <a:off x="6728760" y="2459520"/>
-            <a:ext cx="544320" cy="432000"/>
+            <a:off x="6728400" y="2459520"/>
+            <a:ext cx="545040" cy="432000"/>
           </a:xfrm>
           <a:prstGeom prst="straightConnector1">
             <a:avLst/>
@@ -7317,9 +7317,9 @@
         <p:grpSpPr>
           <a:xfrm>
             <a:off x="7272000" y="2198520"/>
-            <a:ext cx="1043280" cy="521280"/>
+            <a:ext cx="1042920" cy="520920"/>
             <a:chOff x="7272000" y="2198520"/>
-            <a:chExt cx="1043280" cy="521280"/>
+            <a:chExt cx="1042920" cy="520920"/>
           </a:xfrm>
         </p:grpSpPr>
         <p:sp>
@@ -7331,7 +7331,7 @@
           <p:spPr>
             <a:xfrm>
               <a:off x="7272000" y="2198520"/>
-              <a:ext cx="916200" cy="459720"/>
+              <a:ext cx="915840" cy="459360"/>
             </a:xfrm>
             <a:prstGeom prst="rect">
               <a:avLst/>
@@ -7395,7 +7395,7 @@
           <p:spPr>
             <a:xfrm>
               <a:off x="8074080" y="2488320"/>
-              <a:ext cx="241200" cy="231480"/>
+              <a:ext cx="240840" cy="231120"/>
             </a:xfrm>
             <a:prstGeom prst="rect">
               <a:avLst/>
@@ -7416,8 +7416,8 @@
         </p:nvCxnSpPr>
         <p:spPr>
           <a:xfrm>
-            <a:off x="5724360" y="3795480"/>
-            <a:ext cx="350280" cy="1440"/>
+            <a:off x="5724000" y="3795480"/>
+            <a:ext cx="351000" cy="1800"/>
           </a:xfrm>
           <a:prstGeom prst="straightConnector1">
             <a:avLst/>
@@ -7444,7 +7444,7 @@
         <p:spPr>
           <a:xfrm>
             <a:off x="6073560" y="3598200"/>
-            <a:ext cx="394920" cy="394920"/>
+            <a:ext cx="394560" cy="394560"/>
           </a:xfrm>
           <a:prstGeom prst="rect">
             <a:avLst/>
@@ -7463,7 +7463,7 @@
         <p:spPr>
           <a:xfrm flipV="1">
             <a:off x="8242200" y="2259360"/>
-            <a:ext cx="349560" cy="181080"/>
+            <a:ext cx="349920" cy="181440"/>
           </a:xfrm>
           <a:prstGeom prst="straightConnector1">
             <a:avLst/>
@@ -7490,7 +7490,7 @@
         <p:spPr>
           <a:xfrm>
             <a:off x="8590680" y="2061720"/>
-            <a:ext cx="394920" cy="394920"/>
+            <a:ext cx="394560" cy="394560"/>
           </a:xfrm>
           <a:prstGeom prst="rect">
             <a:avLst/>
@@ -7513,7 +7513,7 @@
         <p:spPr>
           <a:xfrm>
             <a:off x="8575200" y="2535840"/>
-            <a:ext cx="395280" cy="395280"/>
+            <a:ext cx="394920" cy="394920"/>
           </a:xfrm>
           <a:prstGeom prst="rect">
             <a:avLst/>
@@ -7534,7 +7534,7 @@
         <p:spPr>
           <a:xfrm>
             <a:off x="8238960" y="2445840"/>
-            <a:ext cx="336600" cy="288000"/>
+            <a:ext cx="336600" cy="287640"/>
           </a:xfrm>
           <a:prstGeom prst="straightConnector1">
             <a:avLst/>
@@ -7557,9 +7557,9 @@
         <p:grpSpPr>
           <a:xfrm>
             <a:off x="7268760" y="3314880"/>
-            <a:ext cx="1043280" cy="521280"/>
+            <a:ext cx="1042920" cy="520920"/>
             <a:chOff x="7268760" y="3314880"/>
-            <a:chExt cx="1043280" cy="521280"/>
+            <a:chExt cx="1042920" cy="520920"/>
           </a:xfrm>
         </p:grpSpPr>
         <p:sp>
@@ -7571,7 +7571,7 @@
           <p:spPr>
             <a:xfrm>
               <a:off x="7268760" y="3314880"/>
-              <a:ext cx="916200" cy="459720"/>
+              <a:ext cx="915840" cy="459360"/>
             </a:xfrm>
             <a:prstGeom prst="rect">
               <a:avLst/>
@@ -7635,7 +7635,7 @@
           <p:spPr>
             <a:xfrm>
               <a:off x="8070840" y="3604680"/>
-              <a:ext cx="241200" cy="231480"/>
+              <a:ext cx="240840" cy="231120"/>
             </a:xfrm>
             <a:prstGeom prst="rect">
               <a:avLst/>
@@ -7655,7 +7655,7 @@
         <p:spPr>
           <a:xfrm flipV="1">
             <a:off x="8238960" y="3375720"/>
-            <a:ext cx="349560" cy="181080"/>
+            <a:ext cx="349920" cy="181440"/>
           </a:xfrm>
           <a:prstGeom prst="straightConnector1">
             <a:avLst/>
@@ -7682,7 +7682,7 @@
         <p:spPr>
           <a:xfrm>
             <a:off x="8587440" y="3178080"/>
-            <a:ext cx="394920" cy="394920"/>
+            <a:ext cx="394560" cy="394560"/>
           </a:xfrm>
           <a:prstGeom prst="rect">
             <a:avLst/>
@@ -7705,7 +7705,7 @@
         <p:spPr>
           <a:xfrm>
             <a:off x="8571960" y="3652200"/>
-            <a:ext cx="395280" cy="395280"/>
+            <a:ext cx="394920" cy="394920"/>
           </a:xfrm>
           <a:prstGeom prst="rect">
             <a:avLst/>
@@ -7726,7 +7726,7 @@
         <p:spPr>
           <a:xfrm>
             <a:off x="8235720" y="3562200"/>
-            <a:ext cx="336600" cy="288000"/>
+            <a:ext cx="336600" cy="287640"/>
           </a:xfrm>
           <a:prstGeom prst="straightConnector1">
             <a:avLst/>
@@ -7751,7 +7751,7 @@
         <p:spPr>
           <a:xfrm>
             <a:off x="6725160" y="2897280"/>
-            <a:ext cx="543960" cy="678600"/>
+            <a:ext cx="543960" cy="678240"/>
           </a:xfrm>
           <a:prstGeom prst="straightConnector1">
             <a:avLst/>
@@ -7774,7 +7774,7 @@
         <p:spPr>
           <a:xfrm>
             <a:off x="7087680" y="3096000"/>
-            <a:ext cx="2519280" cy="1131840"/>
+            <a:ext cx="2518920" cy="1131480"/>
           </a:xfrm>
           <a:prstGeom prst="rect">
             <a:avLst/>
@@ -7822,7 +7822,7 @@
         <p:spPr>
           <a:xfrm>
             <a:off x="7269480" y="4150800"/>
-            <a:ext cx="1117800" cy="344160"/>
+            <a:ext cx="1117440" cy="343800"/>
           </a:xfrm>
           <a:prstGeom prst="rect">
             <a:avLst/>
@@ -7876,7 +7876,7 @@
         <p:spPr>
           <a:xfrm>
             <a:off x="7087680" y="1863000"/>
-            <a:ext cx="2519280" cy="1131840"/>
+            <a:ext cx="2518920" cy="1131480"/>
           </a:xfrm>
           <a:prstGeom prst="rect">
             <a:avLst/>
@@ -7924,7 +7924,7 @@
         <p:spPr>
           <a:xfrm>
             <a:off x="7269480" y="1477800"/>
-            <a:ext cx="1117800" cy="344160"/>
+            <a:ext cx="1117440" cy="343800"/>
           </a:xfrm>
           <a:prstGeom prst="rect">
             <a:avLst/>
@@ -8012,7 +8012,7 @@
         <p:spPr>
           <a:xfrm>
             <a:off x="324000" y="2126160"/>
-            <a:ext cx="499320" cy="466200"/>
+            <a:ext cx="498960" cy="465840"/>
           </a:xfrm>
           <a:prstGeom prst="rect">
             <a:avLst/>
@@ -8035,7 +8035,7 @@
         <p:spPr>
           <a:xfrm>
             <a:off x="324360" y="3278520"/>
-            <a:ext cx="499320" cy="466200"/>
+            <a:ext cx="498960" cy="465840"/>
           </a:xfrm>
           <a:prstGeom prst="rect">
             <a:avLst/>
@@ -8054,7 +8054,7 @@
         <p:spPr>
           <a:xfrm>
             <a:off x="324000" y="1728000"/>
-            <a:ext cx="681480" cy="382680"/>
+            <a:ext cx="681120" cy="382320"/>
           </a:xfrm>
           <a:prstGeom prst="rect">
             <a:avLst/>
@@ -8108,7 +8108,7 @@
         <p:spPr>
           <a:xfrm>
             <a:off x="324360" y="2900520"/>
-            <a:ext cx="681480" cy="382680"/>
+            <a:ext cx="681120" cy="382320"/>
           </a:xfrm>
           <a:prstGeom prst="rect">
             <a:avLst/>
@@ -8166,7 +8166,7 @@
         <p:spPr>
           <a:xfrm>
             <a:off x="1638000" y="2166840"/>
-            <a:ext cx="394920" cy="394920"/>
+            <a:ext cx="394560" cy="394560"/>
           </a:xfrm>
           <a:prstGeom prst="rect">
             <a:avLst/>
@@ -8189,7 +8189,7 @@
         <p:spPr>
           <a:xfrm>
             <a:off x="1967040" y="2287080"/>
-            <a:ext cx="232200" cy="321840"/>
+            <a:ext cx="231840" cy="321480"/>
           </a:xfrm>
           <a:prstGeom prst="rect">
             <a:avLst/>
@@ -8208,7 +8208,7 @@
         <p:spPr>
           <a:xfrm>
             <a:off x="1548360" y="1728360"/>
-            <a:ext cx="1043280" cy="382680"/>
+            <a:ext cx="1042920" cy="382320"/>
           </a:xfrm>
           <a:prstGeom prst="rect">
             <a:avLst/>
@@ -8242,7 +8242,7 @@
                 <a:latin typeface="Calibri"/>
                 <a:ea typeface="Calibri"/>
               </a:rPr>
-              <a:t>LUCAS-Core 2009</a:t>
+              <a:t>LUCAS-Core 2009/2018</a:t>
             </a:r>
             <a:endParaRPr b="0" lang="en-GB" sz="1150" spc="-1" strike="noStrike">
               <a:solidFill>
@@ -8262,7 +8262,7 @@
         <p:spPr>
           <a:xfrm>
             <a:off x="982080" y="2376000"/>
-            <a:ext cx="505080" cy="1080"/>
+            <a:ext cx="505440" cy="1440"/>
           </a:xfrm>
           <a:prstGeom prst="straightConnector1">
             <a:avLst/>
@@ -8289,7 +8289,7 @@
         <p:spPr>
           <a:xfrm>
             <a:off x="1638360" y="3318840"/>
-            <a:ext cx="394920" cy="394920"/>
+            <a:ext cx="394560" cy="394560"/>
           </a:xfrm>
           <a:prstGeom prst="rect">
             <a:avLst/>
@@ -8308,7 +8308,7 @@
         <p:spPr>
           <a:xfrm>
             <a:off x="1548720" y="2916360"/>
-            <a:ext cx="1042920" cy="529200"/>
+            <a:ext cx="1042560" cy="528840"/>
           </a:xfrm>
           <a:prstGeom prst="rect">
             <a:avLst/>
@@ -8342,7 +8342,7 @@
                 <a:latin typeface="Calibri"/>
                 <a:ea typeface="Calibri"/>
               </a:rPr>
-              <a:t>LUCAS-Topsoil 2018</a:t>
+              <a:t>LUCAS-Topsoil 2009/2018</a:t>
             </a:r>
             <a:endParaRPr b="0" lang="en-GB" sz="1150" spc="-1" strike="noStrike">
               <a:solidFill>
@@ -8362,7 +8362,7 @@
         <p:spPr>
           <a:xfrm>
             <a:off x="982080" y="3492000"/>
-            <a:ext cx="505080" cy="1080"/>
+            <a:ext cx="505440" cy="1440"/>
           </a:xfrm>
           <a:prstGeom prst="straightConnector1">
             <a:avLst/>
@@ -8389,7 +8389,7 @@
         <p:spPr>
           <a:xfrm>
             <a:off x="1933920" y="3413160"/>
-            <a:ext cx="263520" cy="345960"/>
+            <a:ext cx="263160" cy="345600"/>
           </a:xfrm>
           <a:prstGeom prst="rect">
             <a:avLst/>
@@ -8407,8 +8407,8 @@
         </p:nvSpPr>
         <p:spPr>
           <a:xfrm>
-            <a:off x="2932200" y="2116080"/>
-            <a:ext cx="808560" cy="519480"/>
+            <a:off x="2860200" y="2116080"/>
+            <a:ext cx="808200" cy="519120"/>
           </a:xfrm>
           <a:prstGeom prst="rect">
             <a:avLst/>
@@ -8462,13 +8462,15 @@
       <p:cxnSp>
         <p:nvCxnSpPr>
           <p:cNvPr id="147" name="Google Shape;232;p 17"/>
-          <p:cNvCxnSpPr/>
+          <p:cNvCxnSpPr>
+            <a:endCxn id="146" idx="1"/>
+          </p:cNvCxnSpPr>
           <p:nvPr/>
         </p:nvCxnSpPr>
         <p:spPr>
-          <a:xfrm>
-            <a:off x="2314080" y="2376000"/>
-            <a:ext cx="582840" cy="720"/>
+          <a:xfrm flipV="1">
+            <a:off x="2314080" y="2375640"/>
+            <a:ext cx="546480" cy="720"/>
           </a:xfrm>
           <a:prstGeom prst="straightConnector1">
             <a:avLst/>
@@ -8490,8 +8492,8 @@
         </p:nvSpPr>
         <p:spPr>
           <a:xfrm>
-            <a:off x="2934720" y="3232080"/>
-            <a:ext cx="808560" cy="519480"/>
+            <a:off x="2862720" y="3232080"/>
+            <a:ext cx="808200" cy="519120"/>
           </a:xfrm>
           <a:prstGeom prst="rect">
             <a:avLst/>
@@ -8545,13 +8547,15 @@
       <p:cxnSp>
         <p:nvCxnSpPr>
           <p:cNvPr id="149" name="Google Shape;232;p 18"/>
-          <p:cNvCxnSpPr/>
+          <p:cNvCxnSpPr>
+            <a:endCxn id="148" idx="1"/>
+          </p:cNvCxnSpPr>
           <p:nvPr/>
         </p:nvCxnSpPr>
         <p:spPr>
-          <a:xfrm>
-            <a:off x="2317320" y="3492000"/>
-            <a:ext cx="582120" cy="720"/>
+          <a:xfrm flipV="1">
+            <a:off x="2317320" y="3491640"/>
+            <a:ext cx="545760" cy="720"/>
           </a:xfrm>
           <a:prstGeom prst="straightConnector1">
             <a:avLst/>
@@ -8573,8 +8577,8 @@
         </p:nvSpPr>
         <p:spPr>
           <a:xfrm>
-            <a:off x="4303440" y="2275920"/>
-            <a:ext cx="808560" cy="519480"/>
+            <a:off x="4231440" y="2311920"/>
+            <a:ext cx="808200" cy="519120"/>
           </a:xfrm>
           <a:prstGeom prst="rect">
             <a:avLst/>
@@ -8636,8 +8640,8 @@
         </p:nvCxnSpPr>
         <p:spPr>
           <a:xfrm>
-            <a:off x="3740760" y="2375640"/>
-            <a:ext cx="563040" cy="160200"/>
+            <a:off x="3668400" y="2375640"/>
+            <a:ext cx="563400" cy="196200"/>
           </a:xfrm>
           <a:prstGeom prst="straightConnector1">
             <a:avLst/>
@@ -8662,8 +8666,8 @@
         </p:nvCxnSpPr>
         <p:spPr>
           <a:xfrm flipV="1">
-            <a:off x="3743280" y="2535480"/>
-            <a:ext cx="560520" cy="956520"/>
+            <a:off x="3670920" y="2571480"/>
+            <a:ext cx="560880" cy="920520"/>
           </a:xfrm>
           <a:prstGeom prst="straightConnector1">
             <a:avLst/>
@@ -8686,7 +8690,7 @@
         <p:spPr>
           <a:xfrm>
             <a:off x="144000" y="1694520"/>
-            <a:ext cx="3779280" cy="2265480"/>
+            <a:ext cx="5256000" cy="2625480"/>
           </a:xfrm>
           <a:prstGeom prst="rect">
             <a:avLst/>
@@ -8710,6 +8714,11 @@
             <a:noAutofit/>
           </a:bodyPr>
           <a:p>
+            <a:pPr>
+              <a:lnSpc>
+                <a:spcPct val="100000"/>
+              </a:lnSpc>
+            </a:pPr>
             <a:endParaRPr b="0" lang="en-GB" sz="1400" spc="-1" strike="noStrike">
               <a:solidFill>
                 <a:srgbClr val="000000"/>
@@ -8729,7 +8738,7 @@
         <p:spPr>
           <a:xfrm>
             <a:off x="357480" y="1325160"/>
-            <a:ext cx="1117800" cy="344160"/>
+            <a:ext cx="1117440" cy="343800"/>
           </a:xfrm>
           <a:prstGeom prst="rect">
             <a:avLst/>
@@ -8784,9 +8793,9 @@
           <p:nvPr/>
         </p:nvCxnSpPr>
         <p:spPr>
-          <a:xfrm>
-            <a:off x="5112000" y="2535480"/>
-            <a:ext cx="520560" cy="392040"/>
+          <a:xfrm flipV="1">
+            <a:off x="5039640" y="2423160"/>
+            <a:ext cx="844920" cy="148680"/>
           </a:xfrm>
           <a:prstGeom prst="straightConnector1">
             <a:avLst/>
@@ -8800,66 +8809,6 @@
           </a:ln>
         </p:spPr>
       </p:cxnSp>
-      <p:sp>
-        <p:nvSpPr>
-          <p:cNvPr id="156" name="Google Shape;183;p 8"/>
-          <p:cNvSpPr/>
-          <p:nvPr/>
-        </p:nvSpPr>
-        <p:spPr>
-          <a:xfrm>
-            <a:off x="5632200" y="2667600"/>
-            <a:ext cx="667800" cy="519480"/>
-          </a:xfrm>
-          <a:prstGeom prst="rect">
-            <a:avLst/>
-          </a:prstGeom>
-          <a:noFill/>
-          <a:ln w="12700">
-            <a:solidFill>
-              <a:srgbClr val="000000"/>
-            </a:solidFill>
-            <a:miter/>
-          </a:ln>
-        </p:spPr>
-        <p:style>
-          <a:lnRef idx="0"/>
-          <a:fillRef idx="0"/>
-          <a:effectRef idx="0"/>
-          <a:fontRef idx="minor"/>
-        </p:style>
-        <p:txBody>
-          <a:bodyPr lIns="90000" rIns="90000" tIns="45000" bIns="45000" anchor="ctr">
-            <a:noAutofit/>
-          </a:bodyPr>
-          <a:p>
-            <a:pPr algn="ctr">
-              <a:lnSpc>
-                <a:spcPct val="100000"/>
-              </a:lnSpc>
-              <a:tabLst>
-                <a:tab algn="l" pos="0"/>
-              </a:tabLst>
-            </a:pPr>
-            <a:r>
-              <a:rPr b="0" lang="en-US" sz="1000" spc="-1" strike="noStrike">
-                <a:solidFill>
-                  <a:schemeClr val="dk1"/>
-                </a:solidFill>
-                <a:latin typeface="Calibri"/>
-                <a:ea typeface="Calibri"/>
-              </a:rPr>
-              <a:t>Points Selection (AoS)</a:t>
-            </a:r>
-            <a:endParaRPr b="0" lang="en-GB" sz="1000" spc="-1" strike="noStrike">
-              <a:solidFill>
-                <a:srgbClr val="000000"/>
-              </a:solidFill>
-              <a:latin typeface="Arial"/>
-            </a:endParaRPr>
-          </a:p>
-        </p:txBody>
-      </p:sp>
       <p:cxnSp>
         <p:nvCxnSpPr>
           <p:cNvPr id="157" name="Google Shape;232;p 22"/>
@@ -8871,8 +8820,8 @@
         </p:nvCxnSpPr>
         <p:spPr>
           <a:xfrm>
-            <a:off x="4707720" y="2795400"/>
-            <a:ext cx="232560" cy="380880"/>
+            <a:off x="4635360" y="2831040"/>
+            <a:ext cx="232560" cy="345240"/>
           </a:xfrm>
           <a:prstGeom prst="straightConnector1">
             <a:avLst/>
@@ -8894,8 +8843,8 @@
         </p:nvSpPr>
         <p:spPr>
           <a:xfrm>
-            <a:off x="4535640" y="3175920"/>
-            <a:ext cx="808560" cy="519480"/>
+            <a:off x="4463640" y="3175920"/>
+            <a:ext cx="808200" cy="519120"/>
           </a:xfrm>
           <a:prstGeom prst="rect">
             <a:avLst/>
@@ -8935,7 +8884,7 @@
                 <a:latin typeface="Calibri"/>
                 <a:ea typeface="Calibri"/>
               </a:rPr>
-              <a:t>Summary Tables</a:t>
+              <a:t>Summary Statistics</a:t>
             </a:r>
             <a:endParaRPr b="0" lang="en-GB" sz="1000" spc="-1" strike="noStrike">
               <a:solidFill>
@@ -8946,116 +8895,18 @@
           </a:p>
         </p:txBody>
       </p:sp>
-      <p:sp>
-        <p:nvSpPr>
-          <p:cNvPr id="159" name="Google Shape;147;p 7"/>
-          <p:cNvSpPr/>
-          <p:nvPr/>
-        </p:nvSpPr>
-        <p:spPr>
-          <a:xfrm>
-            <a:off x="4176000" y="2160000"/>
-            <a:ext cx="1224000" cy="2160000"/>
-          </a:xfrm>
-          <a:prstGeom prst="rect">
-            <a:avLst/>
-          </a:prstGeom>
-          <a:noFill/>
-          <a:ln w="36000">
-            <a:solidFill>
-              <a:srgbClr val="808080"/>
-            </a:solidFill>
-            <a:miter/>
-          </a:ln>
-        </p:spPr>
-        <p:style>
-          <a:lnRef idx="0"/>
-          <a:fillRef idx="0"/>
-          <a:effectRef idx="0"/>
-          <a:fontRef idx="minor"/>
-        </p:style>
-        <p:txBody>
-          <a:bodyPr lIns="102960" rIns="102960" tIns="57240" bIns="57240" anchor="ctr">
-            <a:noAutofit/>
-          </a:bodyPr>
-          <a:p>
-            <a:endParaRPr b="0" lang="en-GB" sz="1400" spc="-1" strike="noStrike">
-              <a:solidFill>
-                <a:srgbClr val="000000"/>
-              </a:solidFill>
-              <a:latin typeface="Arial"/>
-              <a:ea typeface="DejaVu Sans"/>
-            </a:endParaRPr>
-          </a:p>
-        </p:txBody>
-      </p:sp>
-      <p:sp>
-        <p:nvSpPr>
-          <p:cNvPr id="160" name=""/>
-          <p:cNvSpPr/>
-          <p:nvPr/>
-        </p:nvSpPr>
-        <p:spPr>
-          <a:xfrm>
-            <a:off x="4176000" y="1835640"/>
-            <a:ext cx="1117800" cy="344160"/>
-          </a:xfrm>
-          <a:prstGeom prst="rect">
-            <a:avLst/>
-          </a:prstGeom>
-          <a:noFill/>
-          <a:ln w="0">
-            <a:noFill/>
-          </a:ln>
-        </p:spPr>
-        <p:style>
-          <a:lnRef idx="0"/>
-          <a:fillRef idx="0"/>
-          <a:effectRef idx="0"/>
-          <a:fontRef idx="minor"/>
-        </p:style>
-        <p:txBody>
-          <a:bodyPr lIns="90000" rIns="90000" tIns="45000" bIns="45000" anchor="t">
-            <a:noAutofit/>
-          </a:bodyPr>
-          <a:p>
-            <a:pPr>
-              <a:lnSpc>
-                <a:spcPct val="100000"/>
-              </a:lnSpc>
-            </a:pPr>
-            <a:r>
-              <a:rPr b="1" lang="en-US" sz="2000" spc="-1" strike="noStrike">
-                <a:solidFill>
-                  <a:srgbClr val="c9211e"/>
-                </a:solidFill>
-                <a:latin typeface="Calibri"/>
-                <a:ea typeface="Calibri"/>
-              </a:rPr>
-              <a:t>Step 2a</a:t>
-            </a:r>
-            <a:endParaRPr b="0" lang="en-GB" sz="2000" spc="-1" strike="noStrike">
-              <a:solidFill>
-                <a:srgbClr val="000000"/>
-              </a:solidFill>
-              <a:latin typeface="Arial"/>
-            </a:endParaRPr>
-          </a:p>
-        </p:txBody>
-      </p:sp>
       <p:cxnSp>
         <p:nvCxnSpPr>
-          <p:cNvPr id="161" name="Google Shape;232;p 23"/>
+          <p:cNvPr id="159" name="Google Shape;232;p 23"/>
           <p:cNvCxnSpPr>
-            <a:stCxn id="162" idx="3"/>
-            <a:endCxn id="163" idx="1"/>
+            <a:stCxn id="160" idx="3"/>
           </p:cNvCxnSpPr>
           <p:nvPr/>
         </p:nvCxnSpPr>
         <p:spPr>
-          <a:xfrm flipV="1">
-            <a:off x="7448760" y="2459160"/>
-            <a:ext cx="507600" cy="468360"/>
+          <a:xfrm>
+            <a:off x="7592400" y="2423160"/>
+            <a:ext cx="364320" cy="360"/>
           </a:xfrm>
           <a:prstGeom prst="straightConnector1">
             <a:avLst/>
@@ -9071,28 +8922,28 @@
       </p:cxnSp>
       <p:grpSp>
         <p:nvGrpSpPr>
-          <p:cNvPr id="164" name="Google Shape;244;p 2"/>
+          <p:cNvPr id="161" name="Google Shape;244;p 2"/>
           <p:cNvGrpSpPr/>
           <p:nvPr/>
         </p:nvGrpSpPr>
         <p:grpSpPr>
           <a:xfrm>
-            <a:off x="7956000" y="2198520"/>
-            <a:ext cx="1043280" cy="521280"/>
-            <a:chOff x="7956000" y="2198520"/>
-            <a:chExt cx="1043280" cy="521280"/>
+            <a:off x="7956000" y="2162520"/>
+            <a:ext cx="1042920" cy="520920"/>
+            <a:chOff x="7956000" y="2162520"/>
+            <a:chExt cx="1042920" cy="520920"/>
           </a:xfrm>
         </p:grpSpPr>
         <p:sp>
           <p:nvSpPr>
-            <p:cNvPr id="165" name="Google Shape;245;p 3"/>
+            <p:cNvPr id="162" name="Google Shape;245;p 3"/>
             <p:cNvSpPr/>
             <p:nvPr/>
           </p:nvSpPr>
           <p:spPr>
             <a:xfrm>
-              <a:off x="7956000" y="2198520"/>
-              <a:ext cx="916200" cy="459720"/>
+              <a:off x="7956000" y="2162520"/>
+              <a:ext cx="915840" cy="459360"/>
             </a:xfrm>
             <a:prstGeom prst="rect">
               <a:avLst/>
@@ -9145,7 +8996,7 @@
         </p:sp>
         <p:pic>
           <p:nvPicPr>
-            <p:cNvPr id="166" name="Google Shape;246;p 3" descr=""/>
+            <p:cNvPr id="163" name="Google Shape;246;p 3" descr=""/>
             <p:cNvPicPr/>
             <p:nvPr/>
           </p:nvPicPr>
@@ -9155,8 +9006,8 @@
           </p:blipFill>
           <p:spPr>
             <a:xfrm>
-              <a:off x="8758080" y="2488320"/>
-              <a:ext cx="241200" cy="231480"/>
+              <a:off x="8758080" y="2452320"/>
+              <a:ext cx="240840" cy="231120"/>
             </a:xfrm>
             <a:prstGeom prst="rect">
               <a:avLst/>
@@ -9169,17 +9020,16 @@
       </p:grpSp>
       <p:cxnSp>
         <p:nvCxnSpPr>
-          <p:cNvPr id="167" name="Google Shape;232;p 24"/>
+          <p:cNvPr id="164" name="Google Shape;232;p 24"/>
           <p:cNvCxnSpPr>
             <a:stCxn id="158" idx="2"/>
-            <a:endCxn id="168" idx="0"/>
           </p:cNvCxnSpPr>
           <p:nvPr/>
         </p:nvCxnSpPr>
         <p:spPr>
           <a:xfrm>
-            <a:off x="4939920" y="3695400"/>
-            <a:ext cx="226440" cy="191160"/>
+            <a:off x="4867560" y="3695040"/>
+            <a:ext cx="299160" cy="191880"/>
           </a:xfrm>
           <a:prstGeom prst="straightConnector1">
             <a:avLst/>
@@ -9195,14 +9045,14 @@
       </p:cxnSp>
       <p:cxnSp>
         <p:nvCxnSpPr>
-          <p:cNvPr id="169" name="Google Shape;232;p 25"/>
+          <p:cNvPr id="165" name="Google Shape;232;p 25"/>
           <p:cNvCxnSpPr/>
           <p:nvPr/>
         </p:nvCxnSpPr>
         <p:spPr>
           <a:xfrm flipV="1">
-            <a:off x="8926200" y="2259360"/>
-            <a:ext cx="349560" cy="181080"/>
+            <a:off x="8926200" y="2223360"/>
+            <a:ext cx="349920" cy="181440"/>
           </a:xfrm>
           <a:prstGeom prst="straightConnector1">
             <a:avLst/>
@@ -9218,7 +9068,7 @@
       </p:cxnSp>
       <p:pic>
         <p:nvPicPr>
-          <p:cNvPr id="170" name="Google Shape;319;p 8" descr=""/>
+          <p:cNvPr id="166" name="Google Shape;319;p 8" descr=""/>
           <p:cNvPicPr/>
           <p:nvPr/>
         </p:nvPicPr>
@@ -9228,8 +9078,8 @@
         </p:blipFill>
         <p:spPr>
           <a:xfrm>
-            <a:off x="9274680" y="2061720"/>
-            <a:ext cx="394920" cy="394920"/>
+            <a:off x="9274680" y="2025720"/>
+            <a:ext cx="394560" cy="394560"/>
           </a:xfrm>
           <a:prstGeom prst="rect">
             <a:avLst/>
@@ -9241,7 +9091,7 @@
       </p:pic>
       <p:pic>
         <p:nvPicPr>
-          <p:cNvPr id="171" name="" descr=""/>
+          <p:cNvPr id="167" name="" descr=""/>
           <p:cNvPicPr/>
           <p:nvPr/>
         </p:nvPicPr>
@@ -9251,8 +9101,8 @@
         </p:blipFill>
         <p:spPr>
           <a:xfrm>
-            <a:off x="9259200" y="2535840"/>
-            <a:ext cx="395280" cy="395280"/>
+            <a:off x="9259200" y="2499840"/>
+            <a:ext cx="394920" cy="394920"/>
           </a:xfrm>
           <a:prstGeom prst="rect">
             <a:avLst/>
@@ -9264,16 +9114,16 @@
       </p:pic>
       <p:cxnSp>
         <p:nvCxnSpPr>
-          <p:cNvPr id="172" name="Google Shape;232;p 26"/>
+          <p:cNvPr id="168" name="Google Shape;232;p 26"/>
           <p:cNvCxnSpPr>
-            <a:endCxn id="171" idx="1"/>
+            <a:endCxn id="167" idx="1"/>
           </p:cNvCxnSpPr>
           <p:nvPr/>
         </p:nvCxnSpPr>
         <p:spPr>
           <a:xfrm>
-            <a:off x="8922960" y="2445840"/>
-            <a:ext cx="336600" cy="288000"/>
+            <a:off x="8922960" y="2409840"/>
+            <a:ext cx="336600" cy="287640"/>
           </a:xfrm>
           <a:prstGeom prst="straightConnector1">
             <a:avLst/>
@@ -9289,28 +9139,28 @@
       </p:cxnSp>
       <p:grpSp>
         <p:nvGrpSpPr>
-          <p:cNvPr id="173" name="Google Shape;244;p 3"/>
+          <p:cNvPr id="169" name="Google Shape;244;p 3"/>
           <p:cNvGrpSpPr/>
           <p:nvPr/>
         </p:nvGrpSpPr>
         <p:grpSpPr>
           <a:xfrm>
-            <a:off x="7952760" y="3314880"/>
-            <a:ext cx="1043280" cy="521280"/>
-            <a:chOff x="7952760" y="3314880"/>
-            <a:chExt cx="1043280" cy="521280"/>
+            <a:off x="7952760" y="3350880"/>
+            <a:ext cx="1042920" cy="520920"/>
+            <a:chOff x="7952760" y="3350880"/>
+            <a:chExt cx="1042920" cy="520920"/>
           </a:xfrm>
         </p:grpSpPr>
         <p:sp>
           <p:nvSpPr>
-            <p:cNvPr id="174" name="Google Shape;245;p 4"/>
+            <p:cNvPr id="170" name="Google Shape;245;p 4"/>
             <p:cNvSpPr/>
             <p:nvPr/>
           </p:nvSpPr>
           <p:spPr>
             <a:xfrm>
-              <a:off x="7952760" y="3314880"/>
-              <a:ext cx="916200" cy="459720"/>
+              <a:off x="7952760" y="3350880"/>
+              <a:ext cx="915840" cy="459360"/>
             </a:xfrm>
             <a:prstGeom prst="rect">
               <a:avLst/>
@@ -9363,7 +9213,7 @@
         </p:sp>
         <p:pic>
           <p:nvPicPr>
-            <p:cNvPr id="175" name="Google Shape;246;p 4" descr=""/>
+            <p:cNvPr id="171" name="Google Shape;246;p 4" descr=""/>
             <p:cNvPicPr/>
             <p:nvPr/>
           </p:nvPicPr>
@@ -9373,8 +9223,8 @@
           </p:blipFill>
           <p:spPr>
             <a:xfrm>
-              <a:off x="8754840" y="3604680"/>
-              <a:ext cx="241200" cy="231480"/>
+              <a:off x="8754840" y="3640680"/>
+              <a:ext cx="240840" cy="231120"/>
             </a:xfrm>
             <a:prstGeom prst="rect">
               <a:avLst/>
@@ -9387,14 +9237,14 @@
       </p:grpSp>
       <p:cxnSp>
         <p:nvCxnSpPr>
-          <p:cNvPr id="176" name="Google Shape;232;p 27"/>
+          <p:cNvPr id="172" name="Google Shape;232;p 27"/>
           <p:cNvCxnSpPr/>
           <p:nvPr/>
         </p:nvCxnSpPr>
         <p:spPr>
           <a:xfrm flipV="1">
-            <a:off x="8922960" y="3375720"/>
-            <a:ext cx="349560" cy="181080"/>
+            <a:off x="8922960" y="3411720"/>
+            <a:ext cx="349920" cy="181440"/>
           </a:xfrm>
           <a:prstGeom prst="straightConnector1">
             <a:avLst/>
@@ -9410,7 +9260,7 @@
       </p:cxnSp>
       <p:pic>
         <p:nvPicPr>
-          <p:cNvPr id="177" name="Google Shape;319;p 9" descr=""/>
+          <p:cNvPr id="173" name="Google Shape;319;p 9" descr=""/>
           <p:cNvPicPr/>
           <p:nvPr/>
         </p:nvPicPr>
@@ -9420,8 +9270,8 @@
         </p:blipFill>
         <p:spPr>
           <a:xfrm>
-            <a:off x="9271440" y="3178080"/>
-            <a:ext cx="394920" cy="394920"/>
+            <a:off x="9271440" y="3214080"/>
+            <a:ext cx="394560" cy="394560"/>
           </a:xfrm>
           <a:prstGeom prst="rect">
             <a:avLst/>
@@ -9433,7 +9283,7 @@
       </p:pic>
       <p:pic>
         <p:nvPicPr>
-          <p:cNvPr id="178" name="" descr=""/>
+          <p:cNvPr id="174" name="" descr=""/>
           <p:cNvPicPr/>
           <p:nvPr/>
         </p:nvPicPr>
@@ -9443,8 +9293,8 @@
         </p:blipFill>
         <p:spPr>
           <a:xfrm>
-            <a:off x="9255960" y="3652200"/>
-            <a:ext cx="395280" cy="395280"/>
+            <a:off x="9255960" y="3688200"/>
+            <a:ext cx="394920" cy="394920"/>
           </a:xfrm>
           <a:prstGeom prst="rect">
             <a:avLst/>
@@ -9456,16 +9306,16 @@
       </p:pic>
       <p:cxnSp>
         <p:nvCxnSpPr>
-          <p:cNvPr id="179" name="Google Shape;232;p 28"/>
+          <p:cNvPr id="175" name="Google Shape;232;p 28"/>
           <p:cNvCxnSpPr>
-            <a:endCxn id="178" idx="1"/>
+            <a:endCxn id="174" idx="1"/>
           </p:cNvCxnSpPr>
           <p:nvPr/>
         </p:nvCxnSpPr>
         <p:spPr>
           <a:xfrm>
-            <a:off x="8919720" y="3562200"/>
-            <a:ext cx="336600" cy="288000"/>
+            <a:off x="8919720" y="3598200"/>
+            <a:ext cx="336600" cy="287640"/>
           </a:xfrm>
           <a:prstGeom prst="straightConnector1">
             <a:avLst/>
@@ -9481,17 +9331,17 @@
       </p:cxnSp>
       <p:cxnSp>
         <p:nvCxnSpPr>
-          <p:cNvPr id="180" name="Google Shape;232;p 29"/>
+          <p:cNvPr id="176" name="Google Shape;232;p 29"/>
           <p:cNvCxnSpPr>
-            <a:stCxn id="162" idx="3"/>
-            <a:endCxn id="173" idx="1"/>
+            <a:stCxn id="177" idx="3"/>
+            <a:endCxn id="169" idx="1"/>
           </p:cNvCxnSpPr>
           <p:nvPr/>
         </p:nvCxnSpPr>
         <p:spPr>
           <a:xfrm>
-            <a:off x="7448760" y="2927160"/>
-            <a:ext cx="504360" cy="648720"/>
+            <a:off x="7592400" y="3611160"/>
+            <a:ext cx="360720" cy="360"/>
           </a:xfrm>
           <a:prstGeom prst="straightConnector1">
             <a:avLst/>
@@ -9507,14 +9357,14 @@
       </p:cxnSp>
       <p:sp>
         <p:nvSpPr>
-          <p:cNvPr id="181" name="Google Shape;147;p 8"/>
+          <p:cNvPr id="178" name="Google Shape;147;p 8"/>
           <p:cNvSpPr/>
           <p:nvPr/>
         </p:nvSpPr>
         <p:spPr>
           <a:xfrm>
-            <a:off x="7771680" y="3096000"/>
-            <a:ext cx="2092320" cy="1131840"/>
+            <a:off x="5580000" y="3132000"/>
+            <a:ext cx="4283640" cy="1131480"/>
           </a:xfrm>
           <a:prstGeom prst="rect">
             <a:avLst/>
@@ -9538,6 +9388,11 @@
             <a:noAutofit/>
           </a:bodyPr>
           <a:p>
+            <a:pPr>
+              <a:lnSpc>
+                <a:spcPct val="100000"/>
+              </a:lnSpc>
+            </a:pPr>
             <a:endParaRPr b="0" lang="en-GB" sz="1400" spc="-1" strike="noStrike">
               <a:solidFill>
                 <a:srgbClr val="000000"/>
@@ -9550,14 +9405,14 @@
       </p:sp>
       <p:sp>
         <p:nvSpPr>
-          <p:cNvPr id="182" name=""/>
+          <p:cNvPr id="179" name=""/>
           <p:cNvSpPr/>
           <p:nvPr/>
         </p:nvSpPr>
         <p:spPr>
           <a:xfrm>
-            <a:off x="7953480" y="4150800"/>
-            <a:ext cx="1117800" cy="344160"/>
+            <a:off x="7252920" y="4186800"/>
+            <a:ext cx="1117440" cy="343800"/>
           </a:xfrm>
           <a:prstGeom prst="rect">
             <a:avLst/>
@@ -9578,104 +9433,7 @@
             <a:noAutofit/>
           </a:bodyPr>
           <a:p>
-            <a:pPr>
-              <a:lnSpc>
-                <a:spcPct val="100000"/>
-              </a:lnSpc>
-            </a:pPr>
-            <a:r>
-              <a:rPr b="1" lang="en-US" sz="2000" spc="-1" strike="noStrike">
-                <a:solidFill>
-                  <a:srgbClr val="c9211e"/>
-                </a:solidFill>
-                <a:latin typeface="Calibri"/>
-                <a:ea typeface="Calibri"/>
-              </a:rPr>
-              <a:t>Step 4</a:t>
-            </a:r>
-            <a:endParaRPr b="0" lang="en-GB" sz="2000" spc="-1" strike="noStrike">
-              <a:solidFill>
-                <a:srgbClr val="000000"/>
-              </a:solidFill>
-              <a:latin typeface="Arial"/>
-            </a:endParaRPr>
-          </a:p>
-        </p:txBody>
-      </p:sp>
-      <p:sp>
-        <p:nvSpPr>
-          <p:cNvPr id="183" name="Google Shape;147;p 9"/>
-          <p:cNvSpPr/>
-          <p:nvPr/>
-        </p:nvSpPr>
-        <p:spPr>
-          <a:xfrm>
-            <a:off x="7771680" y="1863000"/>
-            <a:ext cx="2092320" cy="1131840"/>
-          </a:xfrm>
-          <a:prstGeom prst="rect">
-            <a:avLst/>
-          </a:prstGeom>
-          <a:noFill/>
-          <a:ln w="36000">
-            <a:solidFill>
-              <a:srgbClr val="808080"/>
-            </a:solidFill>
-            <a:miter/>
-          </a:ln>
-        </p:spPr>
-        <p:style>
-          <a:lnRef idx="0"/>
-          <a:fillRef idx="0"/>
-          <a:effectRef idx="0"/>
-          <a:fontRef idx="minor"/>
-        </p:style>
-        <p:txBody>
-          <a:bodyPr lIns="102960" rIns="102960" tIns="57240" bIns="57240" anchor="ctr">
-            <a:noAutofit/>
-          </a:bodyPr>
-          <a:p>
-            <a:endParaRPr b="0" lang="en-GB" sz="1400" spc="-1" strike="noStrike">
-              <a:solidFill>
-                <a:srgbClr val="000000"/>
-              </a:solidFill>
-              <a:latin typeface="Arial"/>
-              <a:ea typeface="DejaVu Sans"/>
-            </a:endParaRPr>
-          </a:p>
-        </p:txBody>
-      </p:sp>
-      <p:sp>
-        <p:nvSpPr>
-          <p:cNvPr id="184" name=""/>
-          <p:cNvSpPr/>
-          <p:nvPr/>
-        </p:nvSpPr>
-        <p:spPr>
-          <a:xfrm>
-            <a:off x="7953480" y="1477800"/>
-            <a:ext cx="1117800" cy="344160"/>
-          </a:xfrm>
-          <a:prstGeom prst="rect">
-            <a:avLst/>
-          </a:prstGeom>
-          <a:noFill/>
-          <a:ln w="0">
-            <a:noFill/>
-          </a:ln>
-        </p:spPr>
-        <p:style>
-          <a:lnRef idx="0"/>
-          <a:fillRef idx="0"/>
-          <a:effectRef idx="0"/>
-          <a:fontRef idx="minor"/>
-        </p:style>
-        <p:txBody>
-          <a:bodyPr lIns="90000" rIns="90000" tIns="45000" bIns="45000" anchor="t">
-            <a:noAutofit/>
-          </a:bodyPr>
-          <a:p>
-            <a:pPr>
+            <a:pPr algn="ctr">
               <a:lnSpc>
                 <a:spcPct val="100000"/>
               </a:lnSpc>
@@ -9699,39 +9457,16 @@
           </a:p>
         </p:txBody>
       </p:sp>
-      <p:pic>
-        <p:nvPicPr>
-          <p:cNvPr id="185" name="" descr=""/>
-          <p:cNvPicPr/>
-          <p:nvPr/>
-        </p:nvPicPr>
-        <p:blipFill>
-          <a:blip r:embed="rId13"/>
-          <a:stretch/>
-        </p:blipFill>
-        <p:spPr>
-          <a:xfrm>
-            <a:off x="4968000" y="3886200"/>
-            <a:ext cx="396000" cy="396000"/>
-          </a:xfrm>
-          <a:prstGeom prst="rect">
-            <a:avLst/>
-          </a:prstGeom>
-          <a:ln w="0">
-            <a:noFill/>
-          </a:ln>
-        </p:spPr>
-      </p:pic>
-      <p:sp>
-        <p:nvSpPr>
-          <p:cNvPr id="186" name="Google Shape;147;p 10"/>
+      <p:sp>
+        <p:nvSpPr>
+          <p:cNvPr id="180" name="Google Shape;147;p 9"/>
           <p:cNvSpPr/>
           <p:nvPr/>
         </p:nvSpPr>
         <p:spPr>
           <a:xfrm>
-            <a:off x="5508000" y="2169360"/>
-            <a:ext cx="2052000" cy="1610640"/>
+            <a:off x="5580000" y="1755000"/>
+            <a:ext cx="4283640" cy="1131480"/>
           </a:xfrm>
           <a:prstGeom prst="rect">
             <a:avLst/>
@@ -9755,6 +9490,11 @@
             <a:noAutofit/>
           </a:bodyPr>
           <a:p>
+            <a:pPr>
+              <a:lnSpc>
+                <a:spcPct val="100000"/>
+              </a:lnSpc>
+            </a:pPr>
             <a:endParaRPr b="0" lang="en-GB" sz="1400" spc="-1" strike="noStrike">
               <a:solidFill>
                 <a:srgbClr val="000000"/>
@@ -9767,14 +9507,14 @@
       </p:sp>
       <p:sp>
         <p:nvSpPr>
-          <p:cNvPr id="187" name=""/>
+          <p:cNvPr id="181" name=""/>
           <p:cNvSpPr/>
           <p:nvPr/>
         </p:nvSpPr>
         <p:spPr>
           <a:xfrm>
-            <a:off x="5508000" y="1845000"/>
-            <a:ext cx="1117800" cy="344160"/>
+            <a:off x="7252920" y="1369800"/>
+            <a:ext cx="1117440" cy="343800"/>
           </a:xfrm>
           <a:prstGeom prst="rect">
             <a:avLst/>
@@ -9795,7 +9535,7 @@
             <a:noAutofit/>
           </a:bodyPr>
           <a:p>
-            <a:pPr>
+            <a:pPr algn="ctr">
               <a:lnSpc>
                 <a:spcPct val="100000"/>
               </a:lnSpc>
@@ -9808,7 +9548,7 @@
                 <a:latin typeface="Calibri"/>
                 <a:ea typeface="Calibri"/>
               </a:rPr>
-              <a:t>Step 2b</a:t>
+              <a:t>Step 2</a:t>
             </a:r>
             <a:endParaRPr b="0" lang="en-GB" sz="2000" spc="-1" strike="noStrike">
               <a:solidFill>
@@ -9819,16 +9559,39 @@
           </a:p>
         </p:txBody>
       </p:sp>
-      <p:sp>
-        <p:nvSpPr>
-          <p:cNvPr id="162" name="Google Shape;183;p 10"/>
+      <p:pic>
+        <p:nvPicPr>
+          <p:cNvPr id="182" name="" descr=""/>
+          <p:cNvPicPr/>
+          <p:nvPr/>
+        </p:nvPicPr>
+        <p:blipFill>
+          <a:blip r:embed="rId13"/>
+          <a:stretch/>
+        </p:blipFill>
+        <p:spPr>
+          <a:xfrm>
+            <a:off x="4896000" y="3886200"/>
+            <a:ext cx="395640" cy="395640"/>
+          </a:xfrm>
+          <a:prstGeom prst="rect">
+            <a:avLst/>
+          </a:prstGeom>
+          <a:ln w="0">
+            <a:noFill/>
+          </a:ln>
+        </p:spPr>
+      </p:pic>
+      <p:sp>
+        <p:nvSpPr>
+          <p:cNvPr id="160" name="Google Shape;183;p 10"/>
           <p:cNvSpPr/>
           <p:nvPr/>
         </p:nvSpPr>
         <p:spPr>
           <a:xfrm>
-            <a:off x="6660000" y="2667600"/>
-            <a:ext cx="788760" cy="519480"/>
+            <a:off x="6804000" y="2163600"/>
+            <a:ext cx="788400" cy="519120"/>
           </a:xfrm>
           <a:prstGeom prst="rect">
             <a:avLst/>
@@ -9881,17 +9644,249 @@
       </p:sp>
       <p:cxnSp>
         <p:nvCxnSpPr>
-          <p:cNvPr id="188" name="Google Shape;232;p 30"/>
+          <p:cNvPr id="183" name="Google Shape;232;p 30"/>
           <p:cNvCxnSpPr>
             <a:stCxn id="156" idx="3"/>
-            <a:endCxn id="162" idx="1"/>
+            <a:endCxn id="160" idx="1"/>
           </p:cNvCxnSpPr>
           <p:nvPr/>
         </p:nvCxnSpPr>
         <p:spPr>
           <a:xfrm>
-            <a:off x="6300000" y="2927160"/>
-            <a:ext cx="360360" cy="360"/>
+            <a:off x="6551640" y="2423160"/>
+            <a:ext cx="252720" cy="360"/>
+          </a:xfrm>
+          <a:prstGeom prst="straightConnector1">
+            <a:avLst/>
+          </a:prstGeom>
+          <a:ln w="28575">
+            <a:solidFill>
+              <a:srgbClr val="4472c4"/>
+            </a:solidFill>
+            <a:miter/>
+            <a:tailEnd len="med" type="triangle" w="med"/>
+          </a:ln>
+        </p:spPr>
+      </p:cxnSp>
+      <p:sp>
+        <p:nvSpPr>
+          <p:cNvPr id="177" name="Google Shape;183;p 11"/>
+          <p:cNvSpPr/>
+          <p:nvPr/>
+        </p:nvSpPr>
+        <p:spPr>
+          <a:xfrm>
+            <a:off x="6804000" y="3351600"/>
+            <a:ext cx="788400" cy="519120"/>
+          </a:xfrm>
+          <a:prstGeom prst="rect">
+            <a:avLst/>
+          </a:prstGeom>
+          <a:noFill/>
+          <a:ln w="12700">
+            <a:solidFill>
+              <a:srgbClr val="000000"/>
+            </a:solidFill>
+            <a:miter/>
+          </a:ln>
+        </p:spPr>
+        <p:style>
+          <a:lnRef idx="0"/>
+          <a:fillRef idx="0"/>
+          <a:effectRef idx="0"/>
+          <a:fontRef idx="minor"/>
+        </p:style>
+        <p:txBody>
+          <a:bodyPr lIns="90000" rIns="90000" tIns="45000" bIns="45000" anchor="ctr">
+            <a:noAutofit/>
+          </a:bodyPr>
+          <a:p>
+            <a:pPr algn="ctr">
+              <a:lnSpc>
+                <a:spcPct val="100000"/>
+              </a:lnSpc>
+              <a:tabLst>
+                <a:tab algn="l" pos="0"/>
+              </a:tabLst>
+            </a:pPr>
+            <a:r>
+              <a:rPr b="0" lang="en-US" sz="1000" spc="-1" strike="noStrike">
+                <a:solidFill>
+                  <a:schemeClr val="dk1"/>
+                </a:solidFill>
+                <a:latin typeface="Calibri"/>
+                <a:ea typeface="Calibri"/>
+              </a:rPr>
+              <a:t>Variables Selection</a:t>
+            </a:r>
+            <a:endParaRPr b="0" lang="en-GB" sz="1000" spc="-1" strike="noStrike">
+              <a:solidFill>
+                <a:srgbClr val="000000"/>
+              </a:solidFill>
+              <a:latin typeface="Arial"/>
+            </a:endParaRPr>
+          </a:p>
+        </p:txBody>
+      </p:sp>
+      <p:cxnSp>
+        <p:nvCxnSpPr>
+          <p:cNvPr id="184" name="Google Shape;232;p 31"/>
+          <p:cNvCxnSpPr>
+            <a:stCxn id="185" idx="3"/>
+            <a:endCxn id="177" idx="1"/>
+          </p:cNvCxnSpPr>
+          <p:nvPr/>
+        </p:nvCxnSpPr>
+        <p:spPr>
+          <a:xfrm>
+            <a:off x="6551640" y="3611160"/>
+            <a:ext cx="252720" cy="360"/>
+          </a:xfrm>
+          <a:prstGeom prst="straightConnector1">
+            <a:avLst/>
+          </a:prstGeom>
+          <a:ln w="28575">
+            <a:solidFill>
+              <a:srgbClr val="4472c4"/>
+            </a:solidFill>
+            <a:miter/>
+            <a:tailEnd len="med" type="triangle" w="med"/>
+          </a:ln>
+        </p:spPr>
+      </p:cxnSp>
+      <p:sp>
+        <p:nvSpPr>
+          <p:cNvPr id="156" name="Google Shape;183;p 8"/>
+          <p:cNvSpPr/>
+          <p:nvPr/>
+        </p:nvSpPr>
+        <p:spPr>
+          <a:xfrm>
+            <a:off x="5884200" y="2163600"/>
+            <a:ext cx="667440" cy="519120"/>
+          </a:xfrm>
+          <a:prstGeom prst="rect">
+            <a:avLst/>
+          </a:prstGeom>
+          <a:noFill/>
+          <a:ln w="12700">
+            <a:solidFill>
+              <a:srgbClr val="000000"/>
+            </a:solidFill>
+            <a:miter/>
+          </a:ln>
+        </p:spPr>
+        <p:style>
+          <a:lnRef idx="0"/>
+          <a:fillRef idx="0"/>
+          <a:effectRef idx="0"/>
+          <a:fontRef idx="minor"/>
+        </p:style>
+        <p:txBody>
+          <a:bodyPr lIns="90000" rIns="90000" tIns="45000" bIns="45000" anchor="ctr">
+            <a:noAutofit/>
+          </a:bodyPr>
+          <a:p>
+            <a:pPr algn="ctr">
+              <a:lnSpc>
+                <a:spcPct val="100000"/>
+              </a:lnSpc>
+              <a:tabLst>
+                <a:tab algn="l" pos="0"/>
+              </a:tabLst>
+            </a:pPr>
+            <a:r>
+              <a:rPr b="0" lang="en-US" sz="1000" spc="-1" strike="noStrike">
+                <a:solidFill>
+                  <a:schemeClr val="dk1"/>
+                </a:solidFill>
+                <a:latin typeface="Calibri"/>
+                <a:ea typeface="Calibri"/>
+              </a:rPr>
+              <a:t>Points Selection (AoS)</a:t>
+            </a:r>
+            <a:endParaRPr b="0" lang="en-GB" sz="1000" spc="-1" strike="noStrike">
+              <a:solidFill>
+                <a:srgbClr val="000000"/>
+              </a:solidFill>
+              <a:latin typeface="Arial"/>
+            </a:endParaRPr>
+          </a:p>
+        </p:txBody>
+      </p:sp>
+      <p:sp>
+        <p:nvSpPr>
+          <p:cNvPr id="185" name="Google Shape;183;p 12"/>
+          <p:cNvSpPr/>
+          <p:nvPr/>
+        </p:nvSpPr>
+        <p:spPr>
+          <a:xfrm>
+            <a:off x="5884200" y="3351600"/>
+            <a:ext cx="667440" cy="519120"/>
+          </a:xfrm>
+          <a:prstGeom prst="rect">
+            <a:avLst/>
+          </a:prstGeom>
+          <a:noFill/>
+          <a:ln w="12700">
+            <a:solidFill>
+              <a:srgbClr val="000000"/>
+            </a:solidFill>
+            <a:miter/>
+          </a:ln>
+        </p:spPr>
+        <p:style>
+          <a:lnRef idx="0"/>
+          <a:fillRef idx="0"/>
+          <a:effectRef idx="0"/>
+          <a:fontRef idx="minor"/>
+        </p:style>
+        <p:txBody>
+          <a:bodyPr lIns="90000" rIns="90000" tIns="45000" bIns="45000" anchor="ctr">
+            <a:noAutofit/>
+          </a:bodyPr>
+          <a:p>
+            <a:pPr algn="ctr">
+              <a:lnSpc>
+                <a:spcPct val="100000"/>
+              </a:lnSpc>
+              <a:tabLst>
+                <a:tab algn="l" pos="0"/>
+              </a:tabLst>
+            </a:pPr>
+            <a:r>
+              <a:rPr b="0" lang="en-US" sz="1000" spc="-1" strike="noStrike">
+                <a:solidFill>
+                  <a:schemeClr val="dk1"/>
+                </a:solidFill>
+                <a:latin typeface="Calibri"/>
+                <a:ea typeface="Calibri"/>
+              </a:rPr>
+              <a:t>Points Selection (AoS)</a:t>
+            </a:r>
+            <a:endParaRPr b="0" lang="en-GB" sz="1000" spc="-1" strike="noStrike">
+              <a:solidFill>
+                <a:srgbClr val="000000"/>
+              </a:solidFill>
+              <a:latin typeface="Arial"/>
+            </a:endParaRPr>
+          </a:p>
+        </p:txBody>
+      </p:sp>
+      <p:cxnSp>
+        <p:nvCxnSpPr>
+          <p:cNvPr id="186" name="Google Shape;232;p 32"/>
+          <p:cNvCxnSpPr>
+            <a:stCxn id="150" idx="3"/>
+            <a:endCxn id="185" idx="1"/>
+          </p:cNvCxnSpPr>
+          <p:nvPr/>
+        </p:nvCxnSpPr>
+        <p:spPr>
+          <a:xfrm>
+            <a:off x="5039640" y="2571480"/>
+            <a:ext cx="844920" cy="1040040"/>
           </a:xfrm>
           <a:prstGeom prst="straightConnector1">
             <a:avLst/>
